--- a/assets/powerpoints/module-n2-colis/B2-le-code-postal-et-qui-ecrit-a-qui.pptx
+++ b/assets/powerpoints/module-n2-colis/B2-le-code-postal-et-qui-ecrit-a-qui.pptx
@@ -9424,12 +9424,12 @@
         </p:nvSpPr>
         <p:spPr>
           <a:xfrm>
-            <a:off x="566928" y="1856232"/>
-            <a:ext cx="11057839" cy="703579"/>
+            <a:off x="7424927" y="1719072"/>
+            <a:ext cx="4199839" cy="4361688"/>
           </a:xfrm>
           <a:prstGeom prst="roundRect">
             <a:avLst>
-              <a:gd name="adj" fmla="val 20794"/>
+              <a:gd name="adj" fmla="val 3483"/>
             </a:avLst>
           </a:prstGeom>
           <a:solidFill>
@@ -9462,101 +9462,44 @@
           <a:p/>
         </p:txBody>
       </p:sp>
-      <p:sp>
-        <p:nvSpPr>
-          <p:cNvPr id="8" name="Rectangle 7"/>
+      <p:pic>
+        <p:nvPicPr>
+          <p:cNvPr id="8" name="Picture 7" descr="poste-boite.jpg"/>
+          <p:cNvPicPr>
+            <a:picLocks noChangeAspect="1"/>
+          </p:cNvPicPr>
+          <p:nvPr/>
+        </p:nvPicPr>
+        <p:blipFill>
+          <a:blip r:embed="rId2"/>
+          <a:stretch>
+            <a:fillRect/>
+          </a:stretch>
+        </p:blipFill>
+        <p:spPr>
+          <a:xfrm>
+            <a:off x="7644383" y="2638438"/>
+            <a:ext cx="3760927" cy="2522955"/>
+          </a:xfrm>
+          <a:prstGeom prst="rect">
+            <a:avLst/>
+          </a:prstGeom>
+        </p:spPr>
+      </p:pic>
+      <p:sp>
+        <p:nvSpPr>
+          <p:cNvPr id="9" name="Rounded Rectangle 8"/>
           <p:cNvSpPr/>
           <p:nvPr/>
         </p:nvSpPr>
         <p:spPr>
           <a:xfrm>
-            <a:off x="566928" y="1965960"/>
-            <a:ext cx="50292" cy="484123"/>
-          </a:xfrm>
-          <a:prstGeom prst="rect">
-            <a:avLst/>
-          </a:prstGeom>
-          <a:solidFill>
-            <a:srgbClr val="B45309"/>
-          </a:solidFill>
-          <a:ln>
-            <a:noFill/>
-          </a:ln>
-          <a:effectLst/>
-        </p:spPr>
-        <p:style>
-          <a:lnRef idx="1">
-            <a:schemeClr val="accent1"/>
-          </a:lnRef>
-          <a:fillRef idx="3">
-            <a:schemeClr val="accent1"/>
-          </a:fillRef>
-          <a:effectRef idx="2">
-            <a:schemeClr val="accent1"/>
-          </a:effectRef>
-          <a:fontRef idx="minor">
-            <a:schemeClr val="lt1"/>
-          </a:fontRef>
-        </p:style>
-        <p:txBody>
-          <a:bodyPr rtlCol="0" anchor="ctr"/>
-          <a:lstStyle/>
-          <a:p/>
-        </p:txBody>
-      </p:sp>
-      <p:sp>
-        <p:nvSpPr>
-          <p:cNvPr id="9" name="TextBox 8"/>
-          <p:cNvSpPr txBox="1"/>
-          <p:nvPr/>
-        </p:nvSpPr>
-        <p:spPr>
-          <a:xfrm>
-            <a:off x="950976" y="2039112"/>
-            <a:ext cx="10372039" cy="374395"/>
-          </a:xfrm>
-          <a:prstGeom prst="rect">
-            <a:avLst/>
-          </a:prstGeom>
-          <a:noFill/>
-        </p:spPr>
-        <p:txBody>
-          <a:bodyPr wrap="square" lIns="0" rIns="0" tIns="0" bIns="0" anchor="t">
-            <a:spAutoFit/>
-          </a:bodyPr>
-          <a:lstStyle/>
-          <a:p>
-            <a:pPr algn="l">
-              <a:lnSpc>
-                <a:spcPct val="140000"/>
-              </a:lnSpc>
-            </a:pPr>
-            <a:r>
-              <a:rPr sz="1900" b="0" i="0">
-                <a:solidFill>
-                  <a:srgbClr val="3A3D40"/>
-                </a:solidFill>
-                <a:latin typeface="Verdana"/>
-              </a:rPr>
-              <a:t>Que se passe-t-il si l'adresse est incomplète ?</a:t>
-            </a:r>
-          </a:p>
-        </p:txBody>
-      </p:sp>
-      <p:sp>
-        <p:nvSpPr>
-          <p:cNvPr id="10" name="Rounded Rectangle 9"/>
-          <p:cNvSpPr/>
-          <p:nvPr/>
-        </p:nvSpPr>
-        <p:spPr>
-          <a:xfrm>
-            <a:off x="566928" y="2642108"/>
-            <a:ext cx="11057839" cy="703579"/>
+            <a:off x="566928" y="1856232"/>
+            <a:ext cx="6492240" cy="1041400"/>
           </a:xfrm>
           <a:prstGeom prst="roundRect">
             <a:avLst>
-              <a:gd name="adj" fmla="val 20794"/>
+              <a:gd name="adj" fmla="val 14048"/>
             </a:avLst>
           </a:prstGeom>
           <a:solidFill>
@@ -9591,14 +9534,14 @@
       </p:sp>
       <p:sp>
         <p:nvSpPr>
-          <p:cNvPr id="11" name="Rectangle 10"/>
+          <p:cNvPr id="10" name="Rectangle 9"/>
           <p:cNvSpPr/>
           <p:nvPr/>
         </p:nvSpPr>
         <p:spPr>
           <a:xfrm>
-            <a:off x="566928" y="2751836"/>
-            <a:ext cx="50292" cy="484123"/>
+            <a:off x="566928" y="1965960"/>
+            <a:ext cx="50292" cy="821944"/>
           </a:xfrm>
           <a:prstGeom prst="rect">
             <a:avLst/>
@@ -9633,14 +9576,14 @@
       </p:sp>
       <p:sp>
         <p:nvSpPr>
-          <p:cNvPr id="12" name="TextBox 11"/>
+          <p:cNvPr id="11" name="TextBox 10"/>
           <p:cNvSpPr txBox="1"/>
           <p:nvPr/>
         </p:nvSpPr>
         <p:spPr>
           <a:xfrm>
-            <a:off x="950976" y="2824988"/>
-            <a:ext cx="10372039" cy="374395"/>
+            <a:off x="950976" y="2039112"/>
+            <a:ext cx="5806440" cy="712216"/>
           </a:xfrm>
           <a:prstGeom prst="rect">
             <a:avLst/>
@@ -9665,25 +9608,25 @@
                 </a:solidFill>
                 <a:latin typeface="Verdana"/>
               </a:rPr>
-              <a:t>Que se passe-t-il si la personne a déménagé ?</a:t>
-            </a:r>
-          </a:p>
-        </p:txBody>
-      </p:sp>
-      <p:sp>
-        <p:nvSpPr>
-          <p:cNvPr id="13" name="Rounded Rectangle 12"/>
+              <a:t>Que se passe-t-il si l'adresse est incomplète ?</a:t>
+            </a:r>
+          </a:p>
+        </p:txBody>
+      </p:sp>
+      <p:sp>
+        <p:nvSpPr>
+          <p:cNvPr id="12" name="Rounded Rectangle 11"/>
           <p:cNvSpPr/>
           <p:nvPr/>
         </p:nvSpPr>
         <p:spPr>
           <a:xfrm>
-            <a:off x="566928" y="3427984"/>
-            <a:ext cx="11057839" cy="703579"/>
+            <a:off x="566928" y="2979928"/>
+            <a:ext cx="6492240" cy="1041400"/>
           </a:xfrm>
           <a:prstGeom prst="roundRect">
             <a:avLst>
-              <a:gd name="adj" fmla="val 20794"/>
+              <a:gd name="adj" fmla="val 14048"/>
             </a:avLst>
           </a:prstGeom>
           <a:solidFill>
@@ -9718,14 +9661,14 @@
       </p:sp>
       <p:sp>
         <p:nvSpPr>
-          <p:cNvPr id="14" name="Rectangle 13"/>
+          <p:cNvPr id="13" name="Rectangle 12"/>
           <p:cNvSpPr/>
           <p:nvPr/>
         </p:nvSpPr>
         <p:spPr>
           <a:xfrm>
-            <a:off x="566928" y="3537712"/>
-            <a:ext cx="50292" cy="484123"/>
+            <a:off x="566928" y="3089656"/>
+            <a:ext cx="50292" cy="821944"/>
           </a:xfrm>
           <a:prstGeom prst="rect">
             <a:avLst/>
@@ -9760,14 +9703,14 @@
       </p:sp>
       <p:sp>
         <p:nvSpPr>
-          <p:cNvPr id="15" name="TextBox 14"/>
+          <p:cNvPr id="14" name="TextBox 13"/>
           <p:cNvSpPr txBox="1"/>
           <p:nvPr/>
         </p:nvSpPr>
         <p:spPr>
           <a:xfrm>
-            <a:off x="950976" y="3610864"/>
-            <a:ext cx="10372039" cy="374395"/>
+            <a:off x="950976" y="3162808"/>
+            <a:ext cx="5806440" cy="712216"/>
           </a:xfrm>
           <a:prstGeom prst="rect">
             <a:avLst/>
@@ -9792,25 +9735,25 @@
                 </a:solidFill>
                 <a:latin typeface="Verdana"/>
               </a:rPr>
-              <a:t>Comment la lettre peut-elle revenir chez vous ?</a:t>
-            </a:r>
-          </a:p>
-        </p:txBody>
-      </p:sp>
-      <p:sp>
-        <p:nvSpPr>
-          <p:cNvPr id="16" name="Rounded Rectangle 15"/>
+              <a:t>Que se passe-t-il si la personne a déménagé ?</a:t>
+            </a:r>
+          </a:p>
+        </p:txBody>
+      </p:sp>
+      <p:sp>
+        <p:nvSpPr>
+          <p:cNvPr id="15" name="Rounded Rectangle 14"/>
           <p:cNvSpPr/>
           <p:nvPr/>
         </p:nvSpPr>
         <p:spPr>
           <a:xfrm>
-            <a:off x="566928" y="4213860"/>
-            <a:ext cx="11057839" cy="703579"/>
+            <a:off x="566928" y="4103624"/>
+            <a:ext cx="6492240" cy="1041400"/>
           </a:xfrm>
           <a:prstGeom prst="roundRect">
             <a:avLst>
-              <a:gd name="adj" fmla="val 20794"/>
+              <a:gd name="adj" fmla="val 14048"/>
             </a:avLst>
           </a:prstGeom>
           <a:solidFill>
@@ -9845,14 +9788,14 @@
       </p:sp>
       <p:sp>
         <p:nvSpPr>
-          <p:cNvPr id="17" name="Rectangle 16"/>
+          <p:cNvPr id="16" name="Rectangle 15"/>
           <p:cNvSpPr/>
           <p:nvPr/>
         </p:nvSpPr>
         <p:spPr>
           <a:xfrm>
-            <a:off x="566928" y="4323588"/>
-            <a:ext cx="50292" cy="484123"/>
+            <a:off x="566928" y="4213352"/>
+            <a:ext cx="50292" cy="821944"/>
           </a:xfrm>
           <a:prstGeom prst="rect">
             <a:avLst/>
@@ -9887,14 +9830,141 @@
       </p:sp>
       <p:sp>
         <p:nvSpPr>
-          <p:cNvPr id="18" name="TextBox 17"/>
+          <p:cNvPr id="17" name="TextBox 16"/>
           <p:cNvSpPr txBox="1"/>
           <p:nvPr/>
         </p:nvSpPr>
         <p:spPr>
           <a:xfrm>
-            <a:off x="950976" y="4396740"/>
-            <a:ext cx="10372039" cy="374395"/>
+            <a:off x="950976" y="4286504"/>
+            <a:ext cx="5806440" cy="712216"/>
+          </a:xfrm>
+          <a:prstGeom prst="rect">
+            <a:avLst/>
+          </a:prstGeom>
+          <a:noFill/>
+        </p:spPr>
+        <p:txBody>
+          <a:bodyPr wrap="square" lIns="0" rIns="0" tIns="0" bIns="0" anchor="t">
+            <a:spAutoFit/>
+          </a:bodyPr>
+          <a:lstStyle/>
+          <a:p>
+            <a:pPr algn="l">
+              <a:lnSpc>
+                <a:spcPct val="140000"/>
+              </a:lnSpc>
+            </a:pPr>
+            <a:r>
+              <a:rPr sz="1900" b="0" i="0">
+                <a:solidFill>
+                  <a:srgbClr val="3A3D40"/>
+                </a:solidFill>
+                <a:latin typeface="Verdana"/>
+              </a:rPr>
+              <a:t>Comment la lettre peut-elle revenir chez vous ?</a:t>
+            </a:r>
+          </a:p>
+        </p:txBody>
+      </p:sp>
+      <p:sp>
+        <p:nvSpPr>
+          <p:cNvPr id="18" name="Rounded Rectangle 17"/>
+          <p:cNvSpPr/>
+          <p:nvPr/>
+        </p:nvSpPr>
+        <p:spPr>
+          <a:xfrm>
+            <a:off x="566928" y="5227320"/>
+            <a:ext cx="6492240" cy="1041400"/>
+          </a:xfrm>
+          <a:prstGeom prst="roundRect">
+            <a:avLst>
+              <a:gd name="adj" fmla="val 14048"/>
+            </a:avLst>
+          </a:prstGeom>
+          <a:solidFill>
+            <a:srgbClr val="FFFFFF"/>
+          </a:solidFill>
+          <a:ln w="12700">
+            <a:solidFill>
+              <a:srgbClr val="EAEAE8"/>
+            </a:solidFill>
+          </a:ln>
+          <a:effectLst/>
+        </p:spPr>
+        <p:style>
+          <a:lnRef idx="1">
+            <a:schemeClr val="accent1"/>
+          </a:lnRef>
+          <a:fillRef idx="3">
+            <a:schemeClr val="accent1"/>
+          </a:fillRef>
+          <a:effectRef idx="2">
+            <a:schemeClr val="accent1"/>
+          </a:effectRef>
+          <a:fontRef idx="minor">
+            <a:schemeClr val="lt1"/>
+          </a:fontRef>
+        </p:style>
+        <p:txBody>
+          <a:bodyPr rtlCol="0" anchor="ctr"/>
+          <a:lstStyle/>
+          <a:p/>
+        </p:txBody>
+      </p:sp>
+      <p:sp>
+        <p:nvSpPr>
+          <p:cNvPr id="19" name="Rectangle 18"/>
+          <p:cNvSpPr/>
+          <p:nvPr/>
+        </p:nvSpPr>
+        <p:spPr>
+          <a:xfrm>
+            <a:off x="566928" y="5337048"/>
+            <a:ext cx="50292" cy="821944"/>
+          </a:xfrm>
+          <a:prstGeom prst="rect">
+            <a:avLst/>
+          </a:prstGeom>
+          <a:solidFill>
+            <a:srgbClr val="B45309"/>
+          </a:solidFill>
+          <a:ln>
+            <a:noFill/>
+          </a:ln>
+          <a:effectLst/>
+        </p:spPr>
+        <p:style>
+          <a:lnRef idx="1">
+            <a:schemeClr val="accent1"/>
+          </a:lnRef>
+          <a:fillRef idx="3">
+            <a:schemeClr val="accent1"/>
+          </a:fillRef>
+          <a:effectRef idx="2">
+            <a:schemeClr val="accent1"/>
+          </a:effectRef>
+          <a:fontRef idx="minor">
+            <a:schemeClr val="lt1"/>
+          </a:fontRef>
+        </p:style>
+        <p:txBody>
+          <a:bodyPr rtlCol="0" anchor="ctr"/>
+          <a:lstStyle/>
+          <a:p/>
+        </p:txBody>
+      </p:sp>
+      <p:sp>
+        <p:nvSpPr>
+          <p:cNvPr id="20" name="TextBox 19"/>
+          <p:cNvSpPr txBox="1"/>
+          <p:nvPr/>
+        </p:nvSpPr>
+        <p:spPr>
+          <a:xfrm>
+            <a:off x="950976" y="5410200"/>
+            <a:ext cx="5806440" cy="712216"/>
           </a:xfrm>
           <a:prstGeom prst="rect">
             <a:avLst/>

--- a/assets/powerpoints/module-n2-colis/B2-le-code-postal-et-qui-ecrit-a-qui.pptx
+++ b/assets/powerpoints/module-n2-colis/B2-le-code-postal-et-qui-ecrit-a-qui.pptx
@@ -13282,7 +13282,43 @@
                 </a:solidFill>
                 <a:latin typeface="Verdana"/>
               </a:rPr>
-              <a:t>L'&lt;b&gt;expéditeur&lt;/b&gt; écrit son nom en haut, à gauche, en petit. Le &lt;b&gt;destinataire&lt;/b&gt; va au milieu, en plus gros. Le timbre reste en haut, à droite. Si la personne a déménagé, la lettre revient chez l'expéditeur : c'est à cela que sert ce coin-là.</a:t>
+              <a:t>L'</a:t>
+            </a:r>
+            <a:r>
+              <a:rPr sz="2000" b="1" i="0">
+                <a:solidFill>
+                  <a:srgbClr val="4B4F52"/>
+                </a:solidFill>
+                <a:latin typeface="Verdana"/>
+              </a:rPr>
+              <a:t>expéditeur</a:t>
+            </a:r>
+            <a:r>
+              <a:rPr sz="2000" b="0" i="0">
+                <a:solidFill>
+                  <a:srgbClr val="4B4F52"/>
+                </a:solidFill>
+                <a:latin typeface="Verdana"/>
+              </a:rPr>
+              <a:t> écrit son nom en haut, à gauche, en petit. Le </a:t>
+            </a:r>
+            <a:r>
+              <a:rPr sz="2000" b="1" i="0">
+                <a:solidFill>
+                  <a:srgbClr val="4B4F52"/>
+                </a:solidFill>
+                <a:latin typeface="Verdana"/>
+              </a:rPr>
+              <a:t>destinataire</a:t>
+            </a:r>
+            <a:r>
+              <a:rPr sz="2000" b="0" i="0">
+                <a:solidFill>
+                  <a:srgbClr val="4B4F52"/>
+                </a:solidFill>
+                <a:latin typeface="Verdana"/>
+              </a:rPr>
+              <a:t> va au milieu, en plus gros. Le timbre reste en haut, à droite. Si la personne a déménagé, la lettre revient chez l'expéditeur : c'est à cela que sert ce coin-là.</a:t>
             </a:r>
           </a:p>
         </p:txBody>
